--- a/docs/presentations/mis-choice-2026-10.pptx
+++ b/docs/presentations/mis-choice-2026-10.pptx
@@ -559,12 +559,27 @@
           <a:lstStyle/>
           <a:p>
             <a:r>
-              <a:rPr lang="en-US" dirty="0"/>
-              <a:t>Добрый день. Сегодня короткий и, надеюсь, полезный разговор про медицинскую информационную систему — МИС. Это программа, в которой клиника ведёт пациентов, запись, электронные медкарты, кассу и склад.
-Мы с командой уже сделали заметную часть цифровой системы клиники: сайт с онлайн-записью и систему рассылок и напоминаний. Но один вопрос я не могу и не должен решать сам — какую МИС выбрать. Это решение про работу врачей и администраторов каждый день и про деньги клиники.
-План на 20 минут: что требует закон, какие риски есть сейчас, какие системы мы изучили, что предлагаем и какие решения нужны от вас сегодня.</a:t>
-            </a:r>
-            <a:endParaRPr lang="en-US" dirty="0"/>
+              <a:rPr lang="ru-RU" dirty="0"/>
+              <a:t>Добрый день. Сегодня хочу поговорить про одну программу, которая клинике скоро понадобится обязательно. Называется она «медицинская информационная система», сокращённо МИС. По сути это главная рабочая программа клиники: в ней запись, карточки пациентов, медкарты, касса и склад препаратов.</a:t>
+            </a:r>
+          </a:p>
+          <a:p>
+            <a:endParaRPr lang="ru-RU"/>
+          </a:p>
+          <a:p>
+            <a:r>
+              <a:rPr lang="ru-RU" dirty="0"/>
+              <a:t>Мы с командой уже делаем для клиники новый сайт с записью и систему напоминаний пациентам. Но выбор МИС — это не моё решение: в этой программе каждый день работать врачам и администраторам, и платить за неё клинике. Поэтому я изучил варианты и принёс их вам.</a:t>
+            </a:r>
+          </a:p>
+          <a:p>
+            <a:endParaRPr lang="ru-RU"/>
+          </a:p>
+          <a:p>
+            <a:r>
+              <a:rPr lang="ru-RU" dirty="0"/>
+              <a:t>План на 20 минут: что требует закон, чем рискуем сейчас, какие есть варианты и что нужно от вас сегодня.</a:t>
+            </a:r>
           </a:p>
         </p:txBody>
       </p:sp>
@@ -649,13 +664,36 @@
           <a:lstStyle/>
           <a:p>
             <a:r>
-              <a:rPr lang="en-US" dirty="0"/>
-              <a:t>Коротко о каждом финалисте.
-[клик] Клиентикс лучше всех стыкуется с нашей системой: подтверждено, что через его API можно получить свободное время, создать запись и получать уведомления о любых изменениях. Есть ПроДокторов, абонементы, склад, данные хранятся в России. Минусы: для отправки документов в ЕГИСЗ нужен старший тариф за 15 тысяч в месяц, есть лимит 500 визитов в месяц — это нужно сверить с нашей загрузкой, и медицинская часть у него проще, чем у классических МИС.
-[клик] SQNS — ближе всех к косметологии: с 2025 года у них отдельный модуль «Карта косметолога», есть все три агрегатора, ЕГИСЗ и касса, базу переносят бесплатно. Минусы: мы не нашли документацию API и не нашли независимых отзывов. Поэтому условие для них — прислать документацию до демо.
-[клик] Renovatio — самая выгодная модель цены: платим только за врачей, администраторы бесплатно, все модули включены. Открытый API, на нём уже работают сторонние интеграции. Минусы: интеграция с ПроДокторов в свежих источниках не подтверждена, косметологические функции не описаны, и в отзывах жалуются, что после внедрения поддержка становится хуже.</a:t>
-            </a:r>
-            <a:endParaRPr lang="en-US" dirty="0"/>
+              <a:rPr lang="ru-RU" dirty="0"/>
+              <a:t>Коротко о каждом финалисте.</a:t>
+            </a:r>
+          </a:p>
+          <a:p>
+            <a:endParaRPr lang="ru-RU"/>
+          </a:p>
+          <a:p>
+            <a:r>
+              <a:rPr lang="ru-RU" dirty="0"/>
+              <a:t>[клик] Клиентикс лучше всех связывается с нашей системой: другие разработчики уже подключались к нему, и всё нужное там есть. Есть ПроДокторов, абонементы, склад, данные в России. Минусы: для отправки документов государству нужен старший тариф за 15 тысяч. Есть лимит 500 визитов в месяц — надо сверить с вашей загрузкой. И медицинская часть у него проще, чем у классических МИС: изначально это программа сразу для нескольких сфер.</a:t>
+            </a:r>
+          </a:p>
+          <a:p>
+            <a:endParaRPr lang="ru-RU"/>
+          </a:p>
+          <a:p>
+            <a:r>
+              <a:rPr lang="ru-RU" dirty="0"/>
+              <a:t>[клик] SQNS ближе всех к косметологии: с 2025 года у них есть отдельная «Карта косметолога». Есть ПроДокторов и другие медицинские сайты записи, отправка документов государству, касса, базу переносят бесплатно. Минусы: мы не нашли технического описания их «разъёма» и не нашли независимых отзывов клиник. Поэтому условие для них — прислать это описание до показа.</a:t>
+            </a:r>
+          </a:p>
+          <a:p>
+            <a:endParaRPr lang="ru-RU"/>
+          </a:p>
+          <a:p>
+            <a:r>
+              <a:rPr lang="ru-RU" dirty="0"/>
+              <a:t>[клик] Renovatio — самая выгодная: платим только за врачей, администраторы бесплатно, все возможности входят в цену. К ней уже подключаются другие программы. Минусы: связь с ПроДокторов в свежих источниках не подтверждена, про косметологию ничего не сказано, и в отзывах жалуются, что после внедрения поддержка становится хуже.</a:t>
+            </a:r>
           </a:p>
         </p:txBody>
       </p:sp>
@@ -740,12 +778,27 @@
           <a:lstStyle/>
           <a:p>
             <a:r>
-              <a:rPr lang="en-US" dirty="0"/>
-              <a:t>Почему MEDODS, который был фаворитом в нашем первом обзоре, теперь в резерве.
-[клик] По двум пунктам у него лучшие подтверждения: интеграция с ПроДокторов и бесплатный модуль ЕГИСЗ. Но API у него платный, уведомлений о записях нет, косметология в описании не упоминается вообще, пользователи жалуются, что раньше бесплатные модули стали платными, а поддержка работает только до 16:00 по Москве — вечерние часы клиники не покрывает. Позовём его, если Renovatio не подтвердит ПроДокторов или SQNS не пришлёт документацию API.
-[клик] Medesk на своём сайте заявляет самый полный набор для косметологии: фото до и после, шаблоны инъекций и аппаратных процедур. Но это заявления самого производителя, API есть только на старшем тарифе, и в отзывах устойчиво жалуются на поддержку. Позовём, если врачам на демо не хватит косметологических функций у трёх финалистов.</a:t>
-            </a:r>
-            <a:endParaRPr lang="en-US" dirty="0"/>
+              <a:rPr lang="ru-RU" dirty="0"/>
+              <a:t>Почему эти две в запасе, а не в финале.</a:t>
+            </a:r>
+          </a:p>
+          <a:p>
+            <a:endParaRPr lang="ru-RU"/>
+          </a:p>
+          <a:p>
+            <a:r>
+              <a:rPr lang="ru-RU" dirty="0"/>
+              <a:t>[клик] MEDODS сначала был моим фаворитом. У него точно есть ПроДокторов и бесплатная отправка документов государству. Но подключение других программ у него платное, про косметологию на сайте ни слова, клиенты жалуются, что цены растут, а поддержка работает только до 16:00. Позовём его, если кто-то из финалистов отвалится.</a:t>
+            </a:r>
+          </a:p>
+          <a:p>
+            <a:endParaRPr lang="ru-RU"/>
+          </a:p>
+          <a:p>
+            <a:r>
+              <a:rPr lang="ru-RU" dirty="0"/>
+              <a:t>[клик] Medesk на своём сайте обещает больше всех для косметологии: фото «до/после», готовые формы для уколов и аппаратных процедур. Но это слова самого продавца, подключить нашу систему можно только на дорогом тарифе, и на поддержку много жалоб. Позовём, если врачам не хватит косметологии у трёх финалистов.</a:t>
+            </a:r>
           </a:p>
         </p:txBody>
       </p:sp>
@@ -830,13 +883,36 @@
           <a:lstStyle/>
           <a:p>
             <a:r>
-              <a:rPr lang="en-US" dirty="0"/>
-              <a:t>Про деньги. Это ориентиры для клиники на 3–5 врачей и 1–3 администраторов, по ценам на сайтах и в каталогах.
-[клик] Renovatio — примерно 3,3–5,5 тысячи в месяц, потому что платим только за врачей. Клиентикс — 7 тысяч на тарифе «Стандарт» и 15 на «Максимуме», который, скорее всего, понадобится для ЕГИСЗ. MEDODS — около 8–10 тысяч плюс платные модули, включая API и ПроДокторов. SQNS цену публично не раскрывает — запросим.
-[клик] Для масштаба: минимальный штраф за Google-таблицу — миллион рублей. Это больше пяти лет подписки даже на самом дорогом тарифе из этих систем, а для Renovatio — больше пятнадцати.
-[клик] Что нужно заложить сверху: электронные подписи врачам, оператора передачи данных в ЕГИСЗ, тариф ПроДокторов и кассу. Эти суммы мы уточним в коммерческих предложениях. А вот SMS-напоминания в бюджет МИС закладывать не нужно — их берёт на себя наша система.</a:t>
-            </a:r>
-            <a:endParaRPr lang="en-US" dirty="0"/>
+              <a:rPr lang="ru-RU" dirty="0"/>
+              <a:t>Про деньги. Это примерные цифры для клиники с 3–5 врачами и 1–3 администраторами, по ценам с сайтов и из каталогов.</a:t>
+            </a:r>
+          </a:p>
+          <a:p>
+            <a:endParaRPr lang="ru-RU"/>
+          </a:p>
+          <a:p>
+            <a:r>
+              <a:rPr lang="ru-RU" dirty="0"/>
+              <a:t>[клик] Renovatio — примерно 3,3–5,5 тысячи в месяц, потому что платим только за врачей. Клиентикс — 7 тысяч на обычном тарифе и 15 на старшем, который, скорее всего, понадобится. MEDODS — около 8–10 тысяч плюс платные дополнения. SQNS цену публично не пишет, запросим.</a:t>
+            </a:r>
+          </a:p>
+          <a:p>
+            <a:endParaRPr lang="ru-RU"/>
+          </a:p>
+          <a:p>
+            <a:r>
+              <a:rPr lang="ru-RU" dirty="0"/>
+              <a:t>[клик] Для сравнения: самый маленький штраф за Google-таблицу — миллион рублей. Это больше пяти лет подписки даже на самом дорогом тарифе.</a:t>
+            </a:r>
+          </a:p>
+          <a:p>
+            <a:endParaRPr lang="ru-RU"/>
+          </a:p>
+          <a:p>
+            <a:r>
+              <a:rPr lang="ru-RU" dirty="0"/>
+              <a:t>[клик] Что нужно заложить сверху: электронные подписи врачам, услугу по отправке документов государству (её иногда оказывает отдельная компания-посредник), тариф ПроДокторов и кассу. Эти суммы уточним в предложениях. А вот на SMS-напоминания деньги в МИС закладывать не нужно: их берёт на себя наша система.</a:t>
+            </a:r>
           </a:p>
         </p:txBody>
       </p:sp>
@@ -921,17 +997,72 @@
           <a:lstStyle/>
           <a:p>
             <a:r>
-              <a:rPr lang="en-US" dirty="0"/>
-              <a:t>План по неделям.
-[клик] Первая неделя — отправляем трём поставщикам письмо с вопросами: документация API, коммерческое предложение, где хранятся данные.
-[клик] Вторая-третья — три демонстрации примерно по полтора часа. Обязательно с врачом и администратором, у каждого своя оценочная таблица.
-[клик] Третья-четвёртая — пробный период у одного-двух финалистов. Мы с Даниилом проверяем подключение нашей системы — только на тестовых данных, без реальных пациентов.
-[клик] Четвёртая-пятая — ваше решение и договор. В договоре обязательно: обработка персональных данных, полная выгрузка при уходе, гарантии работы.
-[клик] С пятой по девятую — внедрение: шаблоны для косметолога, склад, перенос базы, подключение ЕГИСЗ и ПроДокторов.
-[клик] И последние две недели работаем параллельно с Dikidi, переносим онлайн-запись на сайт и в МИС, после чего Dikidi отключаем.
-[клик] И одно правило, которое сэкономит всем время: если поставщик за пять рабочих дней не прислал документацию и цены, он уходит в резерв.</a:t>
-            </a:r>
-            <a:endParaRPr lang="en-US" dirty="0"/>
+              <a:rPr lang="ru-RU" dirty="0"/>
+              <a:t>План по неделям.</a:t>
+            </a:r>
+          </a:p>
+          <a:p>
+            <a:endParaRPr lang="ru-RU"/>
+          </a:p>
+          <a:p>
+            <a:r>
+              <a:rPr lang="ru-RU" dirty="0"/>
+              <a:t>[клик] Первая неделя — пишу трём поставщикам: пришлите техническое описание, цены и ответьте, где хранятся данные.</a:t>
+            </a:r>
+          </a:p>
+          <a:p>
+            <a:endParaRPr lang="ru-RU"/>
+          </a:p>
+          <a:p>
+            <a:r>
+              <a:rPr lang="ru-RU" dirty="0"/>
+              <a:t>[клик] Вторая и третья — три показа примерно по полтора часа. Обязательно с врачом и администратором, у каждого свой список, что проверить.</a:t>
+            </a:r>
+          </a:p>
+          <a:p>
+            <a:endParaRPr lang="ru-RU"/>
+          </a:p>
+          <a:p>
+            <a:r>
+              <a:rPr lang="ru-RU" dirty="0"/>
+              <a:t>[клик] Третья и четвёртая — пробный период у одного-двух финалистов. Мы с Даниилом проверяем, как к ним подключается наша система. Только на выдуманных данных, без настоящих пациентов.</a:t>
+            </a:r>
+          </a:p>
+          <a:p>
+            <a:endParaRPr lang="ru-RU"/>
+          </a:p>
+          <a:p>
+            <a:r>
+              <a:rPr lang="ru-RU" dirty="0"/>
+              <a:t>[клик] Четвёртая и пятая — ваше решение и договор. В договоре обязательно: обработка данных пациентов, полная выгрузка данных, если уйдём, и гарантии, что программа работает.</a:t>
+            </a:r>
+          </a:p>
+          <a:p>
+            <a:endParaRPr lang="ru-RU"/>
+          </a:p>
+          <a:p>
+            <a:r>
+              <a:rPr lang="ru-RU" dirty="0"/>
+              <a:t>[клик] С пятой по девятую — внедрение: формы для косметолога, склад, перенос базы, подключение отправки документов и ПроДокторов.</a:t>
+            </a:r>
+          </a:p>
+          <a:p>
+            <a:endParaRPr lang="ru-RU"/>
+          </a:p>
+          <a:p>
+            <a:r>
+              <a:rPr lang="ru-RU" dirty="0"/>
+              <a:t>[клик] И две недели работаем параллельно с Dikidi, потом запись переезжает на сайт и в МИС, а Dikidi отключаем.</a:t>
+            </a:r>
+          </a:p>
+          <a:p>
+            <a:endParaRPr lang="ru-RU"/>
+          </a:p>
+          <a:p>
+            <a:r>
+              <a:rPr lang="ru-RU" dirty="0"/>
+              <a:t>[клик] И одно правило, которое сэкономит всем время: если поставщик за пять рабочих дней не прислал описание и цены, он уходит в запас. Так мы сразу видим, как они будут работать с нами дальше.</a:t>
+            </a:r>
           </a:p>
         </p:txBody>
       </p:sp>
@@ -1016,16 +1147,72 @@
           <a:lstStyle/>
           <a:p>
             <a:r>
-              <a:rPr lang="en-US" dirty="0"/>
-              <a:t>И наконец, что мне нужно от вас сегодня. Пять пунктов.
-[клик] Первое — согласовать короткий список: Клиентикс, SQNS и Renovatio, резерв — MEDODS и Medesk.
-[клик] Второе — выделить врача и администратора на три демонстрации примерно по полтора часа в ближайшие две недели.
-[клик] Третье — назвать потолок бюджета на МИС в месяц, чтобы я сразу отсекал лишнее.
-[клик] Четвёртое — подключить юриста: проверить, что именно грозит за ЕГИСЗ, посмотреть договор с поставщиком и тексты согласий для пациентов.
-[клик] Пятое — дать вводные: зарегистрированы ли клиника и врачи в ФРМО и ФРМР, подавали ли уведомление в Роскомнадзор, есть ли у врачей электронные подписи, сколько пациентов в базе и визитов в месяц.
-Спасибо. Готов ответить на вопросы. Подробный отчёт со всеми источниками и полный список вопросов поставщикам я пришлю после встречи.</a:t>
-            </a:r>
-            <a:endParaRPr lang="en-US" dirty="0"/>
+              <a:rPr lang="ru-RU" dirty="0"/>
+              <a:t>И наконец — что мне нужно от вас сегодня. Пять пунктов.</a:t>
+            </a:r>
+          </a:p>
+          <a:p>
+            <a:endParaRPr lang="ru-RU"/>
+          </a:p>
+          <a:p>
+            <a:r>
+              <a:rPr lang="ru-RU" dirty="0"/>
+              <a:t>[клик] Первое — согласиться со списком: Клиентикс, SQNS и Renovatio, в запасе MEDODS и Medesk.</a:t>
+            </a:r>
+          </a:p>
+          <a:p>
+            <a:endParaRPr lang="ru-RU"/>
+          </a:p>
+          <a:p>
+            <a:r>
+              <a:rPr lang="ru-RU" dirty="0"/>
+              <a:t>[клик] Второе — выделить врача и администратора на три показа примерно по полтора часа в ближайшие две недели.</a:t>
+            </a:r>
+          </a:p>
+          <a:p>
+            <a:endParaRPr lang="ru-RU"/>
+          </a:p>
+          <a:p>
+            <a:r>
+              <a:rPr lang="ru-RU" dirty="0"/>
+              <a:t>[клик] Третье — сказать, сколько клиника готова платить за программу в месяц, чтобы я сразу отсекал лишнее.</a:t>
+            </a:r>
+          </a:p>
+          <a:p>
+            <a:endParaRPr lang="ru-RU"/>
+          </a:p>
+          <a:p>
+            <a:r>
+              <a:rPr lang="ru-RU" dirty="0"/>
+              <a:t>[клик] Четвёртое — подключить юриста. Он проверит, что именно грозит за неотправку документов, посмотрит договор с поставщиком и тексты согласий для пациентов.</a:t>
+            </a:r>
+          </a:p>
+          <a:p>
+            <a:endParaRPr lang="ru-RU"/>
+          </a:p>
+          <a:p>
+            <a:r>
+              <a:rPr lang="ru-RU" dirty="0"/>
+              <a:t>[клик] Пятое — дать мне несколько ответов. Есть ли клиника и врачи в государственных списках. Подавали ли уведомление в Роскомнадзор. Есть ли у врачей электронные подписи. Сколько пациентов в базе и сколько визитов в месяц.</a:t>
+            </a:r>
+          </a:p>
+          <a:p>
+            <a:endParaRPr lang="ru-RU"/>
+          </a:p>
+          <a:p>
+            <a:r>
+              <a:rPr lang="ru-RU" dirty="0"/>
+              <a:t>Спасибо. Готов ответить на вопросы. Подробный отчёт со всеми источниками пришлю после встречи.</a:t>
+            </a:r>
+          </a:p>
+          <a:p>
+            <a:endParaRPr lang="ru-RU"/>
+          </a:p>
+          <a:p>
+            <a:r>
+              <a:rPr lang="ru-RU" dirty="0"/>
+              <a:t>(Если не готовы решить сразу: попроси хотя бы пункты 2 и 5 — людей на показ и вводные.)</a:t>
+            </a:r>
           </a:p>
         </p:txBody>
       </p:sp>
@@ -1110,10 +1297,18 @@
           <a:lstStyle/>
           <a:p>
             <a:r>
-              <a:rPr lang="en-US" dirty="0"/>
-              <a:t>Это приложение — короткая версия списка вопросов поставщикам. Первые четыре вопроса уходят письмом до демо, остальные проверяем на самой демонстрации. Полный список из 18 вопросов — в отчёте, который я пришлю после встречи.</a:t>
-            </a:r>
-            <a:endParaRPr lang="en-US" dirty="0"/>
+              <a:rPr lang="ru-RU" dirty="0"/>
+              <a:t>Запасной слайд — показывать, только если спросят «а что вы их спросите?».</a:t>
+            </a:r>
+          </a:p>
+          <a:p>
+            <a:endParaRPr lang="ru-RU"/>
+          </a:p>
+          <a:p>
+            <a:r>
+              <a:rPr lang="ru-RU" dirty="0"/>
+              <a:t>«Первые четыре вопроса я отправлю письмом до показа: как подключить нашу систему, сколько стоит и где хранятся данные. Остальные проверим на самом показе — и врачу лучше смотреть на пункты 5 и 8».</a:t>
+            </a:r>
           </a:p>
         </p:txBody>
       </p:sp>
@@ -1198,14 +1393,45 @@
           <a:lstStyle/>
           <a:p>
             <a:r>
-              <a:rPr lang="en-US" dirty="0"/>
-              <a:t>Сначала самое главное — на случай, если дальше слушать будет некогда.
-[клик] Первое. МИС нам нужна не только для удобства. С сентября 2021 года все клиники с медицинской лицензией, включая частные, обязаны передавать электронные медицинские документы в государственную систему ЕГИСЗ. Без МИС это физически невозможно: документы формируются и подписываются только в программе.
-[клик] Второе. Мы изучили больше двадцати систем и предлагаем позвать на демонстрацию три: Клиентикс, SQNS и Renovatio. Ещё две держим в резерве.
-[клик] Третье. По деньгам это порядка 3–15 тысяч рублей в месяц за подписку. Выбрать можно за месяц, полностью перейти и отказаться от Dikidi — примерно за три.
-[клик] И что нужно от вас сегодня: согласовать этот короткий список и выделить врача и администратора, которые посмотрят демо вместе со мной. Без них выбирать нельзя — работать в системе будут они.</a:t>
-            </a:r>
-            <a:endParaRPr lang="en-US" dirty="0"/>
+              <a:rPr lang="ru-RU" dirty="0"/>
+              <a:t>Сначала главное — на случай, если дальше слушать будет некогда.</a:t>
+            </a:r>
+          </a:p>
+          <a:p>
+            <a:endParaRPr lang="ru-RU"/>
+          </a:p>
+          <a:p>
+            <a:r>
+              <a:rPr lang="ru-RU" dirty="0"/>
+              <a:t>[клик] Первое. МИС нужна не только для удобства, а по закону. У государства есть система, куда клиники отправляют медицинские документы в электронном виде. Называется она ЕГИСЗ. Это примерно как онлайн-кассы, которые отправляют чеки в налоговую, только про медицину. С 2021 года это обязаны делать и частные клиники. Без МИС это не сделать.</a:t>
+            </a:r>
+          </a:p>
+          <a:p>
+            <a:endParaRPr lang="ru-RU"/>
+          </a:p>
+          <a:p>
+            <a:r>
+              <a:rPr lang="ru-RU" dirty="0"/>
+              <a:t>[клик] Второе. Я просмотрел больше двадцати таких программ и предлагаю посмотреть вживую три: Клиентикс, SQNS и Renovatio. Ещё две держим в запасе.</a:t>
+            </a:r>
+          </a:p>
+          <a:p>
+            <a:endParaRPr lang="ru-RU"/>
+          </a:p>
+          <a:p>
+            <a:r>
+              <a:rPr lang="ru-RU" dirty="0"/>
+              <a:t>[клик] Третье. По деньгам это подписка от 3 до 15 тысяч рублей в месяц. Выбрать можно за месяц, полностью переехать — примерно за три, и тогда же отказаться от Dikidi.</a:t>
+            </a:r>
+          </a:p>
+          <a:p>
+            <a:endParaRPr lang="ru-RU"/>
+          </a:p>
+          <a:p>
+            <a:r>
+              <a:rPr lang="ru-RU" dirty="0"/>
+              <a:t>[клик] И что нужно от вас сегодня: согласиться с этим списком и выделить врача и администратора, которые посмотрят программы вместе со мной. Работать в них будут они, и без их мнения выбирать нельзя.</a:t>
+            </a:r>
           </a:p>
         </p:txBody>
       </p:sp>
@@ -1290,14 +1516,45 @@
           <a:lstStyle/>
           <a:p>
             <a:r>
-              <a:rPr lang="en-US" dirty="0"/>
-              <a:t>Как всё устроено сейчас. Данные о пациентах живут в трёх местах, и ни одно из них не является медицинской системой.
-Dikidi — это сервис записи для салонов красоты. Медкарты в нём нет, официального способа связать его с нашей системой тоже нет.
-Google-таблица с пациентами — к ней мы вернёмся через слайд, это самый дорогой риск.
-Бумажные карты сами по себе законны. Но с бумаги нельзя отправить документ в ЕГИСЗ.
-[клик] МИС собирает всё в одном месте: пациентов, запись, электронную медкарту с согласиями, кассу, склад препаратов и отправку документов государству. А наша система ClinicHub — напоминания, сценарии после визита, сайт — подключается к МИС и берёт данные оттуда. Поэтому для нас критично, чтобы у МИС был открытый программный интерфейс, API. Об этом ещё скажу.</a:t>
-            </a:r>
-            <a:endParaRPr lang="en-US" dirty="0"/>
+              <a:rPr lang="ru-RU" dirty="0"/>
+              <a:t>Сейчас сведения о пациентах лежат в трёх местах, и ни одно из них не медицинская программа.</a:t>
+            </a:r>
+          </a:p>
+          <a:p>
+            <a:endParaRPr lang="ru-RU"/>
+          </a:p>
+          <a:p>
+            <a:r>
+              <a:rPr lang="ru-RU" dirty="0"/>
+              <a:t>Запись идёт через Dikidi. Это сервис для салонов красоты: медкарты в нём нет, и наша система не может надёжно с ним связаться.</a:t>
+            </a:r>
+          </a:p>
+          <a:p>
+            <a:endParaRPr lang="ru-RU"/>
+          </a:p>
+          <a:p>
+            <a:r>
+              <a:rPr lang="ru-RU" dirty="0"/>
+              <a:t>Список пациентов — в Google-таблице. К ней я вернусь через слайд, это самый дорогой риск.</a:t>
+            </a:r>
+          </a:p>
+          <a:p>
+            <a:endParaRPr lang="ru-RU"/>
+          </a:p>
+          <a:p>
+            <a:r>
+              <a:rPr lang="ru-RU" dirty="0"/>
+              <a:t>Медкарты — бумажные. Это законно, но с бумаги нельзя отправить документ в ту самую государственную систему.</a:t>
+            </a:r>
+          </a:p>
+          <a:p>
+            <a:endParaRPr lang="ru-RU"/>
+          </a:p>
+          <a:p>
+            <a:r>
+              <a:rPr lang="ru-RU" dirty="0"/>
+              <a:t>[клик] МИС собирает всё это в одном месте: пациентов, запись, электронную медкарту с согласиями, кассу, склад и отправку документов государству. А наша система ClinicHub — напоминания, сайт, рассылки — подключается к МИС и берёт данные оттуда. Поэтому для нас важно, чтобы МИС умела отдавать данные другим программам. Дальше вы услышите слово «API» — это именно такой разъём для связи программ.</a:t>
+            </a:r>
           </a:p>
         </p:txBody>
       </p:sp>
@@ -1382,14 +1639,45 @@
           <a:lstStyle/>
           <a:p>
             <a:r>
-              <a:rPr lang="en-US" dirty="0"/>
-              <a:t>Что требует закон. Три цифры.
-[клик] С 2021 года. Отраслевые источники сходятся: с 1 сентября 2021 года все медорганизации с лицензией, включая частные, должны вести регистры организации и врачей — ФРМО и ФРМР — и передавать электронные медицинские документы в ЕГИСЗ. Часто слышно про «отсрочку до 2027 года» — это миф.
-[клик] УКЭП. С 1 сентября 2026 года действует новый приказ Минздрава 209н. Он разрешает вести медкарту полностью в электронном виде, но каждый документ подписывает врач своей усиленной электронной подписью. Значит, подпись нужна каждому врачу.
-[клик] 25 лет — столько хранится амбулаторная карта. Отсюда требование к поставщику: при уходе он обязан отдать нам все данные, включая подписанные документы.
-[клик] Про санкции честно: источники расходятся. Одни говорят о штрафе 30–40 тысяч, другие считают это грубым нарушением лицензионных требований — 100–200 тысяч или приостановка деятельности до 90 суток. Это должен проверить юрист. Но в любом случае риск — лицензионный, а не только денежный.</a:t>
-            </a:r>
-            <a:endParaRPr lang="en-US" dirty="0"/>
+              <a:rPr lang="ru-RU" dirty="0"/>
+              <a:t>Что требует закон. Три цифры.</a:t>
+            </a:r>
+          </a:p>
+          <a:p>
+            <a:endParaRPr lang="ru-RU"/>
+          </a:p>
+          <a:p>
+            <a:r>
+              <a:rPr lang="ru-RU" dirty="0"/>
+              <a:t>[клик] 2021 год. С сентября 2021 года все клиники с медицинской лицензией, в том числе частные, должны делать две вещи. Первая — быть в двух государственных списках: списке клиник и списке врачей. На слайде они названы ФРМО и ФРМР. Вторая — отправлять электронные медицинские документы в ту самую государственную систему. Иногда говорят, что частным клиникам дали отсрочку до 2027 года — это неправда.</a:t>
+            </a:r>
+          </a:p>
+          <a:p>
+            <a:endParaRPr lang="ru-RU"/>
+          </a:p>
+          <a:p>
+            <a:r>
+              <a:rPr lang="ru-RU" dirty="0"/>
+              <a:t>[клик] Электронная подпись. С сентября 2026 года медкарту можно вести полностью в электронном виде, без бумаги. Но каждый такой документ врач подписывает своей электронной подписью. Это та же подпись, что и для налоговой или для подписи договоров, на слайде она названа УКЭП. Значит, подпись нужна каждому врачу.</a:t>
+            </a:r>
+          </a:p>
+          <a:p>
+            <a:endParaRPr lang="ru-RU"/>
+          </a:p>
+          <a:p>
+            <a:r>
+              <a:rPr lang="ru-RU" dirty="0"/>
+              <a:t>[клик] 25 лет — столько хранится медкарта пациента. Значит, если когда-нибудь мы уйдём от поставщика программы, он обязан отдать нам все карты и документы. Это надо записать в договор.</a:t>
+            </a:r>
+          </a:p>
+          <a:p>
+            <a:endParaRPr lang="ru-RU"/>
+          </a:p>
+          <a:p>
+            <a:r>
+              <a:rPr lang="ru-RU" dirty="0"/>
+              <a:t>[клик] Про штрафы скажу честно: источники расходятся. Одни пишут про 30–40 тысяч, другие — про 100–200 тысяч или приостановку работы клиники до 90 дней. Точно скажет юрист. Но главный риск здесь не деньги, а лицензия.</a:t>
+            </a:r>
           </a:p>
         </p:txBody>
       </p:sp>
@@ -1474,15 +1762,54 @@
           <a:lstStyle/>
           <a:p>
             <a:r>
-              <a:rPr lang="en-US" dirty="0"/>
-              <a:t>Теперь про риски текущей схемы. Самый дорогой — Google-таблица с пациентами.
-[клик] Данные о пациентах по закону должны храниться на серверах в России. Серверы Google — за рубежом. Штраф за это — от 1 до 6 миллионов рублей.
-[клик] С 30 мая 2025 года резко выросли штрафы за утечки. Если утечёт база от одной до десяти тысяч человек — а у клиники, скорее всего, такой размер — это 3–5 миллионов.
-[клик] А поскольку в таблице есть сведения о здоровье, при утечке возможен штраф до 15 миллионов.
-[клик] Важно: штраф получает клиника, даже если данные утекли у подрядчика. Про бумажные карты и Dikidi я уже сказал: карты законны, но закрывают путь в ЕГИСЗ, а Dikidi — это вообще не медицинская система.
-Хорошая новость — самый дорогой риск можно убрать уже на этой неделе, не дожидаясь выбора МИС. Следующий слайд.</a:t>
-            </a:r>
-            <a:endParaRPr lang="en-US" dirty="0"/>
+              <a:rPr lang="ru-RU" dirty="0"/>
+              <a:t>Теперь про риски того, как всё устроено сейчас. Самый дорогой — Google-таблица с пациентами.</a:t>
+            </a:r>
+          </a:p>
+          <a:p>
+            <a:endParaRPr lang="ru-RU"/>
+          </a:p>
+          <a:p>
+            <a:r>
+              <a:rPr lang="ru-RU" dirty="0"/>
+              <a:t>[клик] По закону о персональных данных сведения о российских пациентах должны храниться на серверах в России. Серверы Google — за рубежом. Штраф за это — от одного до шести миллионов рублей.</a:t>
+            </a:r>
+          </a:p>
+          <a:p>
+            <a:endParaRPr lang="ru-RU"/>
+          </a:p>
+          <a:p>
+            <a:r>
+              <a:rPr lang="ru-RU" dirty="0"/>
+              <a:t>[клик] С мая 2025 года сильно выросли штрафы за утечки. Если таблица утечёт — например, ссылка на неё попадёт не туда — и в ней от тысячи до десяти тысяч человек, это уже 3–5 миллионов.</a:t>
+            </a:r>
+          </a:p>
+          <a:p>
+            <a:endParaRPr lang="ru-RU"/>
+          </a:p>
+          <a:p>
+            <a:r>
+              <a:rPr lang="ru-RU" dirty="0"/>
+              <a:t>[клик] А если в таблице есть что-то про здоровье пациентов — процедуры, диагнозы, противопоказания, — штраф может дойти до 15 миллионов.</a:t>
+            </a:r>
+          </a:p>
+          <a:p>
+            <a:endParaRPr lang="ru-RU"/>
+          </a:p>
+          <a:p>
+            <a:r>
+              <a:rPr lang="ru-RU" dirty="0"/>
+              <a:t>[клик] И важно: штраф платит клиника, даже если данные утекли не по её вине, а у подрядчика. Про бумажные карты и Dikidi я уже сказал: карты законны, но не дают выполнить требования про электронные документы, а Dikidi — вообще не медицинская программа.</a:t>
+            </a:r>
+          </a:p>
+          <a:p>
+            <a:endParaRPr lang="ru-RU"/>
+          </a:p>
+          <a:p>
+            <a:r>
+              <a:rPr lang="ru-RU" dirty="0"/>
+              <a:t>Хорошая новость: самый дорогой риск можно убрать уже на этой неделе, не дожидаясь МИС.</a:t>
+            </a:r>
           </a:p>
         </p:txBody>
       </p:sp>
@@ -1567,15 +1894,54 @@
           <a:lstStyle/>
           <a:p>
             <a:r>
-              <a:rPr lang="en-US" dirty="0"/>
-              <a:t>Четыре шага, которые не зависят от выбора МИС и снимают самые дорогие риски.
-[клик] Первое — убрать Google-таблицу. Наша система ClinicHub уже умеет хранить пациентов, сервер будет стоять у нас. Переносим пациентов туда и удаляем таблицу. Это убирает риск в миллионы рублей.
-[клик] Второе — проверить, зарегистрированы ли клиника и все врачи в государственных регистрах ФРМО и ФРМР. Это делается через портал ЕГИСЗ, МИС для этого не нужна.
-[клик] Третье — проверить, подано ли уведомление в Роскомнадзор об обработке персональных данных. Если нет — подать, это бесплатно.
-[клик] Четвёртое — заказать врачам усиленную электронную подпись. Она понадобится в любой МИС, а оформление занимает время.
-Если согласны, я подготовлю пошаговые инструкции по каждому пункту.</a:t>
-            </a:r>
-            <a:endParaRPr lang="en-US" dirty="0"/>
+              <a:rPr lang="ru-RU" dirty="0"/>
+              <a:t>Четыре шага, которые не зависят от выбора программы и снимают самые дорогие риски.</a:t>
+            </a:r>
+          </a:p>
+          <a:p>
+            <a:endParaRPr lang="ru-RU"/>
+          </a:p>
+          <a:p>
+            <a:r>
+              <a:rPr lang="ru-RU" dirty="0"/>
+              <a:t>[клик] Первое — убрать Google-таблицу. Наша система уже умеет хранить список пациентов, и стоять она будет у нас, в России. Переносим пациентов туда и удаляем таблицу.</a:t>
+            </a:r>
+          </a:p>
+          <a:p>
+            <a:endParaRPr lang="ru-RU"/>
+          </a:p>
+          <a:p>
+            <a:r>
+              <a:rPr lang="ru-RU" dirty="0"/>
+              <a:t>[клик] Второе — проверить, есть ли клиника и все врачи в тех самых государственных списках клиник и врачей. Это делается на сайте государственной системы, программа для этого не нужна.</a:t>
+            </a:r>
+          </a:p>
+          <a:p>
+            <a:endParaRPr lang="ru-RU"/>
+          </a:p>
+          <a:p>
+            <a:r>
+              <a:rPr lang="ru-RU" dirty="0"/>
+              <a:t>[клик] Третье — проверить, подавала ли клиника уведомление в Роскомнадзор о том, что хранит данные людей. Если нет — подать, это бесплатно и делается онлайн.</a:t>
+            </a:r>
+          </a:p>
+          <a:p>
+            <a:endParaRPr lang="ru-RU"/>
+          </a:p>
+          <a:p>
+            <a:r>
+              <a:rPr lang="ru-RU" dirty="0"/>
+              <a:t>[клик] Четвёртое — заказать врачам электронные подписи. Они понадобятся при любой программе, а оформление занимает время.</a:t>
+            </a:r>
+          </a:p>
+          <a:p>
+            <a:endParaRPr lang="ru-RU"/>
+          </a:p>
+          <a:p>
+            <a:r>
+              <a:rPr lang="ru-RU" dirty="0"/>
+              <a:t>Если согласны, я подготовлю пошаговую инструкцию по каждому пункту.</a:t>
+            </a:r>
           </a:p>
         </p:txBody>
       </p:sp>
@@ -1660,14 +2026,45 @@
           <a:lstStyle/>
           <a:p>
             <a:r>
-              <a:rPr lang="en-US" dirty="0"/>
-              <a:t>По каким критериям мы сравнивали системы. Порядок — это вес критерия.
-[клик] Первое и главное — удобство для врачей. Если врачам неудобно, внедрение провалится, какой бы хорошей ни была система на бумаге. Для косметологии это шаблоны осмотра, фото до и после прямо в карте, информированные согласия с подписью на планшете, продажа курсов и абонементов и учёт препаратов — например, ботулотоксина в единицах.
-Второе — ПроДокторов: чтобы расписание и запись синхронизировались сами.
-Третье — открытый API. Это технический интерфейс, через который наша система будет брать из МИС записи и пациентов, чтобы слать напоминания и показывать на сайте свободное время.
-[клик] Четвёртое — онлайн-запись, чтобы отказаться от Dikidi. Пятое — данные хранятся в России, поставщик подписывает договор на обработку данных и отдаёт все данные при уходе. И шестое — цена.</a:t>
-            </a:r>
-            <a:endParaRPr lang="en-US" dirty="0"/>
+              <a:rPr lang="ru-RU" dirty="0"/>
+              <a:t>По каким признакам я сравнивал программы. Порядок важен: сверху самое главное.</a:t>
+            </a:r>
+          </a:p>
+          <a:p>
+            <a:endParaRPr lang="ru-RU"/>
+          </a:p>
+          <a:p>
+            <a:r>
+              <a:rPr lang="ru-RU" dirty="0"/>
+              <a:t>[клик] Первое и главное — удобство для врачей. Если врачам неудобно, программой не будут пользоваться, какой бы хорошей она ни была. Для косметологии это значит: готовые формы для осмотра, фото «до» и «после» прямо в карте пациента, согласия, которые пациент подписывает на планшете, продажа курсов и абонементов, учёт препаратов. Например, ботокс считают в единицах, и программа должна это уметь.</a:t>
+            </a:r>
+          </a:p>
+          <a:p>
+            <a:endParaRPr lang="ru-RU"/>
+          </a:p>
+          <a:p>
+            <a:r>
+              <a:rPr lang="ru-RU" dirty="0"/>
+              <a:t>Второе — ПроДокторов: чтобы расписание и запись с этого сайта попадали в программу сами, без ручного переноса.</a:t>
+            </a:r>
+          </a:p>
+          <a:p>
+            <a:endParaRPr lang="ru-RU"/>
+          </a:p>
+          <a:p>
+            <a:r>
+              <a:rPr lang="ru-RU" dirty="0"/>
+              <a:t>Третье — тот самый «разъём» для связи программ, API. Через него наша система будет брать из МИС записи, чтобы слать напоминания и показывать на сайте свободное время.</a:t>
+            </a:r>
+          </a:p>
+          <a:p>
+            <a:endParaRPr lang="ru-RU"/>
+          </a:p>
+          <a:p>
+            <a:r>
+              <a:rPr lang="ru-RU" dirty="0"/>
+              <a:t>[клик] Четвёртое — онлайн-запись, чтобы отказаться от Dikidi. Пятое — данные хранятся в России, поставщик подписывает договор об обработке данных и отдаёт всё, если мы уйдём. И шестое — цена.</a:t>
+            </a:r>
           </a:p>
         </p:txBody>
       </p:sp>
@@ -1752,14 +2149,45 @@
           <a:lstStyle/>
           <a:p>
             <a:r>
-              <a:rPr lang="en-US" dirty="0"/>
-              <a:t>Как мы отбирали.
-[клик] Просмотрели больше двадцати систем, которые продаются в России.
-[клик] Восемь изучили подробно: сайты производителей, цены, каталоги, отзывы клиник, документацию для разработчиков.
-[клик] На демо предлагаем позвать три — Клиентикс, SQNS и Renovatio, и ещё две держим в резерве — MEDODS и Medesk.
-[клик] Кого исключили. Салонные программы для косметологов — COSMO, Арника, Beauty Pro, YCLIENTS: у них нет полноценной медкарты и связи с ЕГИСЗ, для клиники с лицензией это шаг в сторону от Dikidi, а не решение. IDENT — система для стоматологий, ставится на компьютер клиники и не даёт нашей системе подключиться. 1С:Медицина — самая мощная по госинтеграции, но для клиники на 3–5 врачей это от 250 тысяч рублей на старте и постоянный программист 1С. МЕДМИС — нечем подтвердить заявленный API. Инфоклиника и Медиалог рассчитаны на крупные сети.</a:t>
-            </a:r>
-            <a:endParaRPr lang="en-US" dirty="0"/>
+              <a:rPr lang="ru-RU" dirty="0"/>
+              <a:t>Как я отбирал.</a:t>
+            </a:r>
+          </a:p>
+          <a:p>
+            <a:endParaRPr lang="ru-RU"/>
+          </a:p>
+          <a:p>
+            <a:r>
+              <a:rPr lang="ru-RU" dirty="0"/>
+              <a:t>[клик] Сначала просмотрел больше двадцати программ, которые продаются в России.</a:t>
+            </a:r>
+          </a:p>
+          <a:p>
+            <a:endParaRPr lang="ru-RU"/>
+          </a:p>
+          <a:p>
+            <a:r>
+              <a:rPr lang="ru-RU" dirty="0"/>
+              <a:t>[клик] Восемь изучил подробно: сайты, цены, отзывы других клиник, технические документы.</a:t>
+            </a:r>
+          </a:p>
+          <a:p>
+            <a:endParaRPr lang="ru-RU"/>
+          </a:p>
+          <a:p>
+            <a:r>
+              <a:rPr lang="ru-RU" dirty="0"/>
+              <a:t>[клик] И на показ предлагаю позвать три: Клиентикс, SQNS и Renovatio. Две — MEDODS и Medesk — в запасе.</a:t>
+            </a:r>
+          </a:p>
+          <a:p>
+            <a:endParaRPr lang="ru-RU"/>
+          </a:p>
+          <a:p>
+            <a:r>
+              <a:rPr lang="ru-RU" dirty="0"/>
+              <a:t>[клик] Кого и почему исключил. Программы для салонов красоты и частных косметологов — в них нет полноценной медкарты и отправки документов государству, это почти то же, что Dikidi. IDENT — программа для стоматологий, ставится на компьютер в клинике, и наша система не сможет к ней нормально подключиться. 1С:Медицина — самая мощная, но для нашей клиники это от 250 тысяч на старте и постоянный программист 1С. МЕДМИС — нечем подтвердить, что она умеет связываться с другими программами. Инфоклиника и Медиалог рассчитаны на большие сети клиник.</a:t>
+            </a:r>
           </a:p>
         </p:txBody>
       </p:sp>
@@ -1844,15 +2272,54 @@
           <a:lstStyle/>
           <a:p>
             <a:r>
-              <a:rPr lang="en-US" dirty="0"/>
-              <a:t>Здесь всё сравнение на одном слайде. Зелёная галочка — подтверждено из нескольких источников, жёлтый вопрос — публично не подтверждено, проверяем на демо. Серым выделен резерв.
-Обратите внимание на три вещи.
-Первое: ни у одной системы независимо не подтверждены фото до/после и подпись согласий на планшете. Medesk заявляет фото, но только в собственном блоге. Поэтому на демо врач должен сам это посмотреть.
-Второе: уведомления о новых и изменённых записях — по-английски вебхуки — подтверждены только у Клиентикса. Для нас это значит, что напоминания и сайт будут видеть изменения сразу, а не с задержкой в несколько минут.
-Третье: связь с ЕГИСЗ так или иначе есть у всех. Но у Клиентикса электронная подпись есть только на старшем тарифе за 15 тысяч в месяц — это важно для бюджета.
-Цены здесь ориентировочные, по данным сайтов и каталогов. Точные цифры будут в коммерческих предложениях.</a:t>
-            </a:r>
-            <a:endParaRPr lang="en-US" dirty="0"/>
+              <a:rPr lang="ru-RU" dirty="0"/>
+              <a:t>Здесь всё сравнение на одном слайде. Не читай таблицу целиком: объясни значки и скажи три вывода.</a:t>
+            </a:r>
+          </a:p>
+          <a:p>
+            <a:endParaRPr lang="ru-RU"/>
+          </a:p>
+          <a:p>
+            <a:r>
+              <a:rPr lang="ru-RU" dirty="0"/>
+              <a:t>Зелёная галочка — есть подтверждение. Жёлтый вопрос — публично не подтверждено, проверим на показе. Серым выделен запас.</a:t>
+            </a:r>
+          </a:p>
+          <a:p>
+            <a:endParaRPr lang="ru-RU"/>
+          </a:p>
+          <a:p>
+            <a:r>
+              <a:rPr lang="ru-RU" dirty="0"/>
+              <a:t>Первое: ни у одной программы мы не смогли независимо подтвердить фото «до/после» и подпись согласий на планшете. Поэтому на показе врач должен сам посмотреть, как это устроено.</a:t>
+            </a:r>
+          </a:p>
+          <a:p>
+            <a:endParaRPr lang="ru-RU"/>
+          </a:p>
+          <a:p>
+            <a:r>
+              <a:rPr lang="ru-RU" dirty="0"/>
+              <a:t>Второе: только Клиентикс сам сообщает другим программам, что запись появилась или изменилась. Для нас это значит, что сайт и напоминания будут видеть изменения сразу. У остальных — с задержкой в несколько минут. Это не критично, но хуже.</a:t>
+            </a:r>
+          </a:p>
+          <a:p>
+            <a:endParaRPr lang="ru-RU"/>
+          </a:p>
+          <a:p>
+            <a:r>
+              <a:rPr lang="ru-RU" dirty="0"/>
+              <a:t>Третье: отправка документов государству есть у всех. Но у Клиентикса она только на старшем тарифе за 15 тысяч в месяц, это важно для бюджета.</a:t>
+            </a:r>
+          </a:p>
+          <a:p>
+            <a:endParaRPr lang="ru-RU"/>
+          </a:p>
+          <a:p>
+            <a:r>
+              <a:rPr lang="ru-RU" dirty="0"/>
+              <a:t>Цены в таблице ориентировочные, с сайтов и каталогов. Точные цифры будут в коммерческих предложениях.</a:t>
+            </a:r>
           </a:p>
         </p:txBody>
       </p:sp>

--- a/docs/presentations/mis-choice-2026-10.pptx
+++ b/docs/presentations/mis-choice-2026-10.pptx
@@ -121,13 +121,13 @@
   <p:extLst>
     <p:ext uri="{521415D9-36F7-43E2-AB2F-B90AF26B5E84}">
       <p14:sectionLst xmlns:p14="http://schemas.microsoft.com/office/powerpoint/2010/main">
-        <p14:section name="Вступление" id="{2b2eccdb-4060-6551-f516-e492c56096b8}">
+        <p14:section name="Вступление" id="{fa00a7f3-fdea-b4c8-6b9a-23dd8a7701d2}">
           <p14:sldIdLst>
             <p14:sldId id="256"/>
             <p14:sldId id="257"/>
           </p14:sldIdLst>
         </p14:section>
-        <p14:section name="Зачем это нужно" id="{0dfc8e92-8cd9-29f3-60fc-13d3796320f7}">
+        <p14:section name="Зачем это нужно" id="{9dc5f112-081c-489f-1f67-407dc5e35ac6}">
           <p14:sldIdLst>
             <p14:sldId id="258"/>
             <p14:sldId id="259"/>
@@ -135,7 +135,7 @@
             <p14:sldId id="261"/>
           </p14:sldIdLst>
         </p14:section>
-        <p14:section name="Варианты" id="{27541017-8722-8bdf-9df2-ea1062e3feab}">
+        <p14:section name="Варианты" id="{ed8ca760-33b1-5296-4b4d-0f12380e0392}">
           <p14:sldIdLst>
             <p14:sldId id="262"/>
             <p14:sldId id="263"/>
@@ -144,14 +144,14 @@
             <p14:sldId id="266"/>
           </p14:sldIdLst>
         </p14:section>
-        <p14:section name="Деньги и план" id="{a1bfd044-49ef-268b-97c1-0d9f924a1402}">
+        <p14:section name="Деньги и план" id="{6b4d2f4d-cdd3-e78b-269f-9861a68c5610}">
           <p14:sldIdLst>
             <p14:sldId id="267"/>
             <p14:sldId id="268"/>
             <p14:sldId id="269"/>
           </p14:sldIdLst>
         </p14:section>
-        <p14:section name="Приложение" id="{177d2e2e-7c36-16a8-bfb6-359fae532bef}">
+        <p14:section name="Приложение" id="{88b01c9a-9577-51e8-f9a5-12534b6e2540}">
           <p14:sldIdLst>
             <p14:sldId id="270"/>
           </p14:sldIdLst>
@@ -7546,7 +7546,7 @@
       </p:sp>
       <p:sp>
         <p:nvSpPr>
-          <p:cNvPr id="25" name="Slide Number Placeholder 0"/>
+          <p:cNvPr id="26" name="Slide Number Placeholder 0"/>
           <p:cNvSpPr>
             <a:spLocks noGrp="1"/>
           </p:cNvSpPr>
@@ -9551,7 +9551,7 @@
       </p:sp>
       <p:sp>
         <p:nvSpPr>
-          <p:cNvPr id="25" name="Slide Number Placeholder 0"/>
+          <p:cNvPr id="32" name="Slide Number Placeholder 0"/>
           <p:cNvSpPr>
             <a:spLocks noGrp="1"/>
           </p:cNvSpPr>
@@ -13411,7 +13411,7 @@
       </p:sp>
       <p:sp>
         <p:nvSpPr>
-          <p:cNvPr id="25" name="Slide Number Placeholder 0"/>
+          <p:cNvPr id="27" name="Slide Number Placeholder 0"/>
           <p:cNvSpPr>
             <a:spLocks noGrp="1"/>
           </p:cNvSpPr>
@@ -15643,7 +15643,7 @@
       </p:sp>
       <p:sp>
         <p:nvSpPr>
-          <p:cNvPr id="25" name="Slide Number Placeholder 0"/>
+          <p:cNvPr id="26" name="Slide Number Placeholder 0"/>
           <p:cNvSpPr>
             <a:spLocks noGrp="1"/>
           </p:cNvSpPr>
@@ -21135,7 +21135,7 @@
       </p:sp>
       <p:sp>
         <p:nvSpPr>
-          <p:cNvPr id="25" name="Slide Number Placeholder 0"/>
+          <p:cNvPr id="39" name="Slide Number Placeholder 0"/>
           <p:cNvSpPr>
             <a:spLocks noGrp="1"/>
           </p:cNvSpPr>
